--- a/doc/Analizador_de_Conversaciones.pptx
+++ b/doc/Analizador_de_Conversaciones.pptx
@@ -5,23 +5,27 @@
     <p:sldMasterId id="2147483648" r:id="rId1"/>
   </p:sldMasterIdLst>
   <p:notesMasterIdLst>
-    <p:notesMasterId r:id="rId16"/>
+    <p:notesMasterId r:id="rId20"/>
   </p:notesMasterIdLst>
   <p:sldIdLst>
     <p:sldId id="256" r:id="rId2"/>
-    <p:sldId id="257" r:id="rId3"/>
-    <p:sldId id="258" r:id="rId4"/>
-    <p:sldId id="259" r:id="rId5"/>
-    <p:sldId id="260" r:id="rId6"/>
-    <p:sldId id="267" r:id="rId7"/>
-    <p:sldId id="269" r:id="rId8"/>
-    <p:sldId id="268" r:id="rId9"/>
-    <p:sldId id="262" r:id="rId10"/>
-    <p:sldId id="263" r:id="rId11"/>
-    <p:sldId id="265" r:id="rId12"/>
-    <p:sldId id="266" r:id="rId13"/>
-    <p:sldId id="264" r:id="rId14"/>
-    <p:sldId id="261" r:id="rId15"/>
+    <p:sldId id="270" r:id="rId3"/>
+    <p:sldId id="257" r:id="rId4"/>
+    <p:sldId id="271" r:id="rId5"/>
+    <p:sldId id="272" r:id="rId6"/>
+    <p:sldId id="273" r:id="rId7"/>
+    <p:sldId id="258" r:id="rId8"/>
+    <p:sldId id="259" r:id="rId9"/>
+    <p:sldId id="260" r:id="rId10"/>
+    <p:sldId id="267" r:id="rId11"/>
+    <p:sldId id="269" r:id="rId12"/>
+    <p:sldId id="268" r:id="rId13"/>
+    <p:sldId id="262" r:id="rId14"/>
+    <p:sldId id="263" r:id="rId15"/>
+    <p:sldId id="265" r:id="rId16"/>
+    <p:sldId id="266" r:id="rId17"/>
+    <p:sldId id="264" r:id="rId18"/>
+    <p:sldId id="261" r:id="rId19"/>
   </p:sldIdLst>
   <p:sldSz cx="18288000" cy="10287000"/>
   <p:notesSz cx="10287000" cy="18288000"/>
@@ -405,7 +409,7 @@
           <a:p>
             <a:fld id="{F7021451-1387-4CA6-816F-3879F97B5CBC}" type="slidenum">
               <a:rPr lang="en-US"/>
-              <a:t>2</a:t>
+              <a:t>3</a:t>
             </a:fld>
             <a:endParaRPr lang="en-US"/>
           </a:p>
@@ -492,7 +496,7 @@
           <a:p>
             <a:fld id="{F7021451-1387-4CA6-816F-3879F97B5CBC}" type="slidenum">
               <a:rPr lang="en-US"/>
-              <a:t>3</a:t>
+              <a:t>7</a:t>
             </a:fld>
             <a:endParaRPr lang="en-US"/>
           </a:p>
@@ -579,7 +583,7 @@
           <a:p>
             <a:fld id="{F7021451-1387-4CA6-816F-3879F97B5CBC}" type="slidenum">
               <a:rPr lang="en-US"/>
-              <a:t>4</a:t>
+              <a:t>8</a:t>
             </a:fld>
             <a:endParaRPr lang="en-US"/>
           </a:p>
@@ -666,7 +670,7 @@
           <a:p>
             <a:fld id="{F7021451-1387-4CA6-816F-3879F97B5CBC}" type="slidenum">
               <a:rPr lang="en-US"/>
-              <a:t>5</a:t>
+              <a:t>9</a:t>
             </a:fld>
             <a:endParaRPr lang="en-US"/>
           </a:p>
@@ -753,7 +757,7 @@
           <a:p>
             <a:fld id="{F7021451-1387-4CA6-816F-3879F97B5CBC}" type="slidenum">
               <a:rPr lang="en-US"/>
-              <a:t>14</a:t>
+              <a:t>18</a:t>
             </a:fld>
             <a:endParaRPr lang="en-US"/>
           </a:p>
@@ -1294,7 +1298,29 @@
                 <a:ea typeface="Arial" pitchFamily="34" charset="-122"/>
                 <a:cs typeface="Arial" pitchFamily="34" charset="-120"/>
               </a:rPr>
-              <a:t>18 DE ABRIL DE 2026</a:t>
+              <a:t>13 DE </a:t>
+            </a:r>
+            <a:r>
+              <a:rPr lang="en-US" kern="0" spc="216" dirty="0">
+                <a:solidFill>
+                  <a:srgbClr val="8A8478"/>
+                </a:solidFill>
+                <a:latin typeface="Arial" pitchFamily="34" charset="0"/>
+                <a:ea typeface="Arial" pitchFamily="34" charset="-122"/>
+                <a:cs typeface="Arial" pitchFamily="34" charset="-120"/>
+              </a:rPr>
+              <a:t>MAYO</a:t>
+            </a:r>
+            <a:r>
+              <a:rPr lang="en-US" sz="1800" kern="0" spc="216" dirty="0">
+                <a:solidFill>
+                  <a:srgbClr val="8A8478"/>
+                </a:solidFill>
+                <a:latin typeface="Arial" pitchFamily="34" charset="0"/>
+                <a:ea typeface="Arial" pitchFamily="34" charset="-122"/>
+                <a:cs typeface="Arial" pitchFamily="34" charset="-120"/>
+              </a:rPr>
+              <a:t> DE 2026</a:t>
             </a:r>
             <a:endParaRPr lang="en-US" sz="1800" dirty="0"/>
           </a:p>
@@ -1480,7 +1506,7 @@
         </p:spPr>
         <p:txBody>
           <a:bodyPr wrap="square" lIns="25400" tIns="25400" rIns="25400" bIns="25400" rtlCol="0" anchor="t">
-            <a:normAutofit fontScale="92500"/>
+            <a:normAutofit fontScale="92500" lnSpcReduction="10000"/>
           </a:bodyPr>
           <a:lstStyle/>
           <a:p>
@@ -1491,7 +1517,7 @@
               <a:buNone/>
             </a:pPr>
             <a:r>
-              <a:rPr lang="en-US" sz="9300" kern="0" spc="-233" dirty="0">
+              <a:rPr lang="en-US" sz="9300" kern="0" spc="-233" dirty="0" err="1">
                 <a:solidFill>
                   <a:srgbClr val="1A1A1A"/>
                 </a:solidFill>
@@ -1499,7 +1525,62 @@
                 <a:ea typeface="Georgia" pitchFamily="34" charset="-122"/>
                 <a:cs typeface="Georgia" pitchFamily="34" charset="-120"/>
               </a:rPr>
-              <a:t>Analizador de Conversaciones de </a:t>
+              <a:t>Analizador</a:t>
+            </a:r>
+            <a:r>
+              <a:rPr lang="en-US" sz="9300" kern="0" spc="-233" dirty="0">
+                <a:solidFill>
+                  <a:srgbClr val="1A1A1A"/>
+                </a:solidFill>
+                <a:latin typeface="Georgia" pitchFamily="34" charset="0"/>
+                <a:ea typeface="Georgia" pitchFamily="34" charset="-122"/>
+                <a:cs typeface="Georgia" pitchFamily="34" charset="-120"/>
+              </a:rPr>
+              <a:t> de </a:t>
+            </a:r>
+            <a:r>
+              <a:rPr lang="en-US" sz="9300" kern="0" spc="-233" dirty="0" err="1">
+                <a:solidFill>
+                  <a:srgbClr val="1A1A1A"/>
+                </a:solidFill>
+                <a:latin typeface="Georgia" pitchFamily="34" charset="0"/>
+                <a:ea typeface="Georgia" pitchFamily="34" charset="-122"/>
+                <a:cs typeface="Georgia" pitchFamily="34" charset="-120"/>
+              </a:rPr>
+              <a:t>Conversaciones</a:t>
+            </a:r>
+            <a:r>
+              <a:rPr lang="en-US" sz="9300" kern="0" spc="-233" dirty="0">
+                <a:solidFill>
+                  <a:srgbClr val="1A1A1A"/>
+                </a:solidFill>
+                <a:latin typeface="Georgia" pitchFamily="34" charset="0"/>
+                <a:ea typeface="Georgia" pitchFamily="34" charset="-122"/>
+                <a:cs typeface="Georgia" pitchFamily="34" charset="-120"/>
+              </a:rPr>
+              <a:t> de Servicio al </a:t>
+            </a:r>
+            <a:r>
+              <a:rPr lang="en-US" sz="9300" kern="0" spc="-233" dirty="0" err="1">
+                <a:solidFill>
+                  <a:srgbClr val="1A1A1A"/>
+                </a:solidFill>
+                <a:latin typeface="Georgia" pitchFamily="34" charset="0"/>
+                <a:ea typeface="Georgia" pitchFamily="34" charset="-122"/>
+                <a:cs typeface="Georgia" pitchFamily="34" charset="-120"/>
+              </a:rPr>
+              <a:t>Cliente</a:t>
+            </a:r>
+            <a:r>
+              <a:rPr lang="en-US" sz="9300" kern="0" spc="-233" dirty="0">
+                <a:solidFill>
+                  <a:srgbClr val="1A1A1A"/>
+                </a:solidFill>
+                <a:latin typeface="Georgia" pitchFamily="34" charset="0"/>
+                <a:ea typeface="Georgia" pitchFamily="34" charset="-122"/>
+                <a:cs typeface="Georgia" pitchFamily="34" charset="-120"/>
+              </a:rPr>
+              <a:t> (Post-Venta) de </a:t>
             </a:r>
             <a:r>
               <a:rPr lang="en-US" sz="9300" i="1" kern="0" spc="-233" dirty="0">
@@ -1759,14 +1840,6 @@
 <file path=ppt/slides/slide10.xml><?xml version="1.0" encoding="utf-8"?>
 <p:sld xmlns:a="http://schemas.openxmlformats.org/drawingml/2006/main" xmlns:r="http://schemas.openxmlformats.org/officeDocument/2006/relationships" xmlns:p="http://schemas.openxmlformats.org/presentationml/2006/main">
   <p:cSld>
-    <p:bg>
-      <p:bgPr>
-        <a:solidFill>
-          <a:srgbClr val="F6F4EF"/>
-        </a:solidFill>
-        <a:effectLst/>
-      </p:bgPr>
-    </p:bg>
     <p:spTree>
       <p:nvGrpSpPr>
         <p:cNvPr id="1" name=""/>
@@ -1786,7 +1859,7 @@
           <p:cNvPr id="3" name="Imagen 2">
             <a:extLst>
               <a:ext uri="{FF2B5EF4-FFF2-40B4-BE49-F238E27FC236}">
-                <a16:creationId xmlns:a16="http://schemas.microsoft.com/office/drawing/2014/main" id="{4D998779-0786-8BD1-9A8F-ABCD25E2BB56}"/>
+                <a16:creationId xmlns:a16="http://schemas.microsoft.com/office/drawing/2014/main" id="{EC848306-1C4F-34F1-8F75-05589E7875B7}"/>
               </a:ext>
             </a:extLst>
           </p:cNvPr>
@@ -1803,8 +1876,8 @@
         </p:blipFill>
         <p:spPr>
           <a:xfrm>
-            <a:off x="1561042" y="1018599"/>
-            <a:ext cx="15165916" cy="8249801"/>
+            <a:off x="1551515" y="1318678"/>
+            <a:ext cx="15184969" cy="7649643"/>
           </a:xfrm>
           <a:prstGeom prst="rect">
             <a:avLst/>
@@ -1814,7 +1887,7 @@
     </p:spTree>
     <p:extLst>
       <p:ext uri="{BB962C8B-B14F-4D97-AF65-F5344CB8AC3E}">
-        <p14:creationId xmlns:p14="http://schemas.microsoft.com/office/powerpoint/2010/main" val="4062977614"/>
+        <p14:creationId xmlns:p14="http://schemas.microsoft.com/office/powerpoint/2010/main" val="2727827770"/>
       </p:ext>
     </p:extLst>
   </p:cSld>
@@ -1827,14 +1900,6 @@
 <file path=ppt/slides/slide11.xml><?xml version="1.0" encoding="utf-8"?>
 <p:sld xmlns:a="http://schemas.openxmlformats.org/drawingml/2006/main" xmlns:r="http://schemas.openxmlformats.org/officeDocument/2006/relationships" xmlns:p="http://schemas.openxmlformats.org/presentationml/2006/main">
   <p:cSld>
-    <p:bg>
-      <p:bgPr>
-        <a:solidFill>
-          <a:srgbClr val="F6F4EF"/>
-        </a:solidFill>
-        <a:effectLst/>
-      </p:bgPr>
-    </p:bg>
     <p:spTree>
       <p:nvGrpSpPr>
         <p:cNvPr id="1" name=""/>
@@ -1854,7 +1919,7 @@
           <p:cNvPr id="3" name="Imagen 2">
             <a:extLst>
               <a:ext uri="{FF2B5EF4-FFF2-40B4-BE49-F238E27FC236}">
-                <a16:creationId xmlns:a16="http://schemas.microsoft.com/office/drawing/2014/main" id="{0546F179-D3EB-5C6B-985F-AEAE03F60033}"/>
+                <a16:creationId xmlns:a16="http://schemas.microsoft.com/office/drawing/2014/main" id="{37F02A10-1E26-7495-2A98-5A25F6E0C729}"/>
               </a:ext>
             </a:extLst>
           </p:cNvPr>
@@ -1871,8 +1936,8 @@
         </p:blipFill>
         <p:spPr>
           <a:xfrm>
-            <a:off x="1570568" y="980494"/>
-            <a:ext cx="15146864" cy="8326012"/>
+            <a:off x="489329" y="856652"/>
+            <a:ext cx="17309341" cy="8573696"/>
           </a:xfrm>
           <a:prstGeom prst="rect">
             <a:avLst/>
@@ -1882,7 +1947,7 @@
     </p:spTree>
     <p:extLst>
       <p:ext uri="{BB962C8B-B14F-4D97-AF65-F5344CB8AC3E}">
-        <p14:creationId xmlns:p14="http://schemas.microsoft.com/office/powerpoint/2010/main" val="1114767022"/>
+        <p14:creationId xmlns:p14="http://schemas.microsoft.com/office/powerpoint/2010/main" val="4240209573"/>
       </p:ext>
     </p:extLst>
   </p:cSld>
@@ -1895,14 +1960,6 @@
 <file path=ppt/slides/slide12.xml><?xml version="1.0" encoding="utf-8"?>
 <p:sld xmlns:a="http://schemas.openxmlformats.org/drawingml/2006/main" xmlns:r="http://schemas.openxmlformats.org/officeDocument/2006/relationships" xmlns:p="http://schemas.openxmlformats.org/presentationml/2006/main">
   <p:cSld>
-    <p:bg>
-      <p:bgPr>
-        <a:solidFill>
-          <a:srgbClr val="F6F4EF"/>
-        </a:solidFill>
-        <a:effectLst/>
-      </p:bgPr>
-    </p:bg>
     <p:spTree>
       <p:nvGrpSpPr>
         <p:cNvPr id="1" name=""/>
@@ -1922,7 +1979,7 @@
           <p:cNvPr id="3" name="Imagen 2">
             <a:extLst>
               <a:ext uri="{FF2B5EF4-FFF2-40B4-BE49-F238E27FC236}">
-                <a16:creationId xmlns:a16="http://schemas.microsoft.com/office/drawing/2014/main" id="{911B2524-CB58-005C-12C7-74B5E2D96EC2}"/>
+                <a16:creationId xmlns:a16="http://schemas.microsoft.com/office/drawing/2014/main" id="{F7B6586D-1779-7C85-2D65-0F9826E6ABA4}"/>
               </a:ext>
             </a:extLst>
           </p:cNvPr>
@@ -1939,8 +1996,8 @@
         </p:blipFill>
         <p:spPr>
           <a:xfrm>
-            <a:off x="1632489" y="1032889"/>
-            <a:ext cx="15023022" cy="8221222"/>
+            <a:off x="1613436" y="1394889"/>
+            <a:ext cx="15061127" cy="7497221"/>
           </a:xfrm>
           <a:prstGeom prst="rect">
             <a:avLst/>
@@ -1950,7 +2007,7 @@
     </p:spTree>
     <p:extLst>
       <p:ext uri="{BB962C8B-B14F-4D97-AF65-F5344CB8AC3E}">
-        <p14:creationId xmlns:p14="http://schemas.microsoft.com/office/powerpoint/2010/main" val="2990986366"/>
+        <p14:creationId xmlns:p14="http://schemas.microsoft.com/office/powerpoint/2010/main" val="3507744762"/>
       </p:ext>
     </p:extLst>
   </p:cSld>
@@ -1990,6 +2047,278 @@
           <p:cNvPr id="3" name="Imagen 2">
             <a:extLst>
               <a:ext uri="{FF2B5EF4-FFF2-40B4-BE49-F238E27FC236}">
+                <a16:creationId xmlns:a16="http://schemas.microsoft.com/office/drawing/2014/main" id="{13345AFF-4ACE-0080-62B9-684542560038}"/>
+              </a:ext>
+            </a:extLst>
+          </p:cNvPr>
+          <p:cNvPicPr>
+            <a:picLocks noChangeAspect="1"/>
+          </p:cNvPicPr>
+          <p:nvPr/>
+        </p:nvPicPr>
+        <p:blipFill>
+          <a:blip r:embed="rId2"/>
+          <a:stretch>
+            <a:fillRect/>
+          </a:stretch>
+        </p:blipFill>
+        <p:spPr>
+          <a:xfrm>
+            <a:off x="427408" y="2309417"/>
+            <a:ext cx="17433183" cy="5668166"/>
+          </a:xfrm>
+          <a:prstGeom prst="rect">
+            <a:avLst/>
+          </a:prstGeom>
+        </p:spPr>
+      </p:pic>
+    </p:spTree>
+    <p:extLst>
+      <p:ext uri="{BB962C8B-B14F-4D97-AF65-F5344CB8AC3E}">
+        <p14:creationId xmlns:p14="http://schemas.microsoft.com/office/powerpoint/2010/main" val="1501440138"/>
+      </p:ext>
+    </p:extLst>
+  </p:cSld>
+  <p:clrMapOvr>
+    <a:masterClrMapping/>
+  </p:clrMapOvr>
+</p:sld>
+</file>
+
+<file path=ppt/slides/slide14.xml><?xml version="1.0" encoding="utf-8"?>
+<p:sld xmlns:a="http://schemas.openxmlformats.org/drawingml/2006/main" xmlns:r="http://schemas.openxmlformats.org/officeDocument/2006/relationships" xmlns:p="http://schemas.openxmlformats.org/presentationml/2006/main">
+  <p:cSld>
+    <p:bg>
+      <p:bgPr>
+        <a:solidFill>
+          <a:srgbClr val="F6F4EF"/>
+        </a:solidFill>
+        <a:effectLst/>
+      </p:bgPr>
+    </p:bg>
+    <p:spTree>
+      <p:nvGrpSpPr>
+        <p:cNvPr id="1" name=""/>
+        <p:cNvGrpSpPr/>
+        <p:nvPr/>
+      </p:nvGrpSpPr>
+      <p:grpSpPr>
+        <a:xfrm>
+          <a:off x="0" y="0"/>
+          <a:ext cx="0" cy="0"/>
+          <a:chOff x="0" y="0"/>
+          <a:chExt cx="0" cy="0"/>
+        </a:xfrm>
+      </p:grpSpPr>
+      <p:pic>
+        <p:nvPicPr>
+          <p:cNvPr id="3" name="Imagen 2">
+            <a:extLst>
+              <a:ext uri="{FF2B5EF4-FFF2-40B4-BE49-F238E27FC236}">
+                <a16:creationId xmlns:a16="http://schemas.microsoft.com/office/drawing/2014/main" id="{4D998779-0786-8BD1-9A8F-ABCD25E2BB56}"/>
+              </a:ext>
+            </a:extLst>
+          </p:cNvPr>
+          <p:cNvPicPr>
+            <a:picLocks noChangeAspect="1"/>
+          </p:cNvPicPr>
+          <p:nvPr/>
+        </p:nvPicPr>
+        <p:blipFill>
+          <a:blip r:embed="rId2"/>
+          <a:stretch>
+            <a:fillRect/>
+          </a:stretch>
+        </p:blipFill>
+        <p:spPr>
+          <a:xfrm>
+            <a:off x="1561042" y="1018599"/>
+            <a:ext cx="15165916" cy="8249801"/>
+          </a:xfrm>
+          <a:prstGeom prst="rect">
+            <a:avLst/>
+          </a:prstGeom>
+        </p:spPr>
+      </p:pic>
+    </p:spTree>
+    <p:extLst>
+      <p:ext uri="{BB962C8B-B14F-4D97-AF65-F5344CB8AC3E}">
+        <p14:creationId xmlns:p14="http://schemas.microsoft.com/office/powerpoint/2010/main" val="4062977614"/>
+      </p:ext>
+    </p:extLst>
+  </p:cSld>
+  <p:clrMapOvr>
+    <a:masterClrMapping/>
+  </p:clrMapOvr>
+</p:sld>
+</file>
+
+<file path=ppt/slides/slide15.xml><?xml version="1.0" encoding="utf-8"?>
+<p:sld xmlns:a="http://schemas.openxmlformats.org/drawingml/2006/main" xmlns:r="http://schemas.openxmlformats.org/officeDocument/2006/relationships" xmlns:p="http://schemas.openxmlformats.org/presentationml/2006/main">
+  <p:cSld>
+    <p:bg>
+      <p:bgPr>
+        <a:solidFill>
+          <a:srgbClr val="F6F4EF"/>
+        </a:solidFill>
+        <a:effectLst/>
+      </p:bgPr>
+    </p:bg>
+    <p:spTree>
+      <p:nvGrpSpPr>
+        <p:cNvPr id="1" name=""/>
+        <p:cNvGrpSpPr/>
+        <p:nvPr/>
+      </p:nvGrpSpPr>
+      <p:grpSpPr>
+        <a:xfrm>
+          <a:off x="0" y="0"/>
+          <a:ext cx="0" cy="0"/>
+          <a:chOff x="0" y="0"/>
+          <a:chExt cx="0" cy="0"/>
+        </a:xfrm>
+      </p:grpSpPr>
+      <p:pic>
+        <p:nvPicPr>
+          <p:cNvPr id="3" name="Imagen 2">
+            <a:extLst>
+              <a:ext uri="{FF2B5EF4-FFF2-40B4-BE49-F238E27FC236}">
+                <a16:creationId xmlns:a16="http://schemas.microsoft.com/office/drawing/2014/main" id="{0546F179-D3EB-5C6B-985F-AEAE03F60033}"/>
+              </a:ext>
+            </a:extLst>
+          </p:cNvPr>
+          <p:cNvPicPr>
+            <a:picLocks noChangeAspect="1"/>
+          </p:cNvPicPr>
+          <p:nvPr/>
+        </p:nvPicPr>
+        <p:blipFill>
+          <a:blip r:embed="rId2"/>
+          <a:stretch>
+            <a:fillRect/>
+          </a:stretch>
+        </p:blipFill>
+        <p:spPr>
+          <a:xfrm>
+            <a:off x="1570568" y="980494"/>
+            <a:ext cx="15146864" cy="8326012"/>
+          </a:xfrm>
+          <a:prstGeom prst="rect">
+            <a:avLst/>
+          </a:prstGeom>
+        </p:spPr>
+      </p:pic>
+    </p:spTree>
+    <p:extLst>
+      <p:ext uri="{BB962C8B-B14F-4D97-AF65-F5344CB8AC3E}">
+        <p14:creationId xmlns:p14="http://schemas.microsoft.com/office/powerpoint/2010/main" val="1114767022"/>
+      </p:ext>
+    </p:extLst>
+  </p:cSld>
+  <p:clrMapOvr>
+    <a:masterClrMapping/>
+  </p:clrMapOvr>
+</p:sld>
+</file>
+
+<file path=ppt/slides/slide16.xml><?xml version="1.0" encoding="utf-8"?>
+<p:sld xmlns:a="http://schemas.openxmlformats.org/drawingml/2006/main" xmlns:r="http://schemas.openxmlformats.org/officeDocument/2006/relationships" xmlns:p="http://schemas.openxmlformats.org/presentationml/2006/main">
+  <p:cSld>
+    <p:bg>
+      <p:bgPr>
+        <a:solidFill>
+          <a:srgbClr val="F6F4EF"/>
+        </a:solidFill>
+        <a:effectLst/>
+      </p:bgPr>
+    </p:bg>
+    <p:spTree>
+      <p:nvGrpSpPr>
+        <p:cNvPr id="1" name=""/>
+        <p:cNvGrpSpPr/>
+        <p:nvPr/>
+      </p:nvGrpSpPr>
+      <p:grpSpPr>
+        <a:xfrm>
+          <a:off x="0" y="0"/>
+          <a:ext cx="0" cy="0"/>
+          <a:chOff x="0" y="0"/>
+          <a:chExt cx="0" cy="0"/>
+        </a:xfrm>
+      </p:grpSpPr>
+      <p:pic>
+        <p:nvPicPr>
+          <p:cNvPr id="3" name="Imagen 2">
+            <a:extLst>
+              <a:ext uri="{FF2B5EF4-FFF2-40B4-BE49-F238E27FC236}">
+                <a16:creationId xmlns:a16="http://schemas.microsoft.com/office/drawing/2014/main" id="{911B2524-CB58-005C-12C7-74B5E2D96EC2}"/>
+              </a:ext>
+            </a:extLst>
+          </p:cNvPr>
+          <p:cNvPicPr>
+            <a:picLocks noChangeAspect="1"/>
+          </p:cNvPicPr>
+          <p:nvPr/>
+        </p:nvPicPr>
+        <p:blipFill>
+          <a:blip r:embed="rId2"/>
+          <a:stretch>
+            <a:fillRect/>
+          </a:stretch>
+        </p:blipFill>
+        <p:spPr>
+          <a:xfrm>
+            <a:off x="1632489" y="1032889"/>
+            <a:ext cx="15023022" cy="8221222"/>
+          </a:xfrm>
+          <a:prstGeom prst="rect">
+            <a:avLst/>
+          </a:prstGeom>
+        </p:spPr>
+      </p:pic>
+    </p:spTree>
+    <p:extLst>
+      <p:ext uri="{BB962C8B-B14F-4D97-AF65-F5344CB8AC3E}">
+        <p14:creationId xmlns:p14="http://schemas.microsoft.com/office/powerpoint/2010/main" val="2990986366"/>
+      </p:ext>
+    </p:extLst>
+  </p:cSld>
+  <p:clrMapOvr>
+    <a:masterClrMapping/>
+  </p:clrMapOvr>
+</p:sld>
+</file>
+
+<file path=ppt/slides/slide17.xml><?xml version="1.0" encoding="utf-8"?>
+<p:sld xmlns:a="http://schemas.openxmlformats.org/drawingml/2006/main" xmlns:r="http://schemas.openxmlformats.org/officeDocument/2006/relationships" xmlns:p="http://schemas.openxmlformats.org/presentationml/2006/main">
+  <p:cSld>
+    <p:bg>
+      <p:bgPr>
+        <a:solidFill>
+          <a:srgbClr val="F6F4EF"/>
+        </a:solidFill>
+        <a:effectLst/>
+      </p:bgPr>
+    </p:bg>
+    <p:spTree>
+      <p:nvGrpSpPr>
+        <p:cNvPr id="1" name=""/>
+        <p:cNvGrpSpPr/>
+        <p:nvPr/>
+      </p:nvGrpSpPr>
+      <p:grpSpPr>
+        <a:xfrm>
+          <a:off x="0" y="0"/>
+          <a:ext cx="0" cy="0"/>
+          <a:chOff x="0" y="0"/>
+          <a:chExt cx="0" cy="0"/>
+        </a:xfrm>
+      </p:grpSpPr>
+      <p:pic>
+        <p:nvPicPr>
+          <p:cNvPr id="3" name="Imagen 2">
+            <a:extLst>
+              <a:ext uri="{FF2B5EF4-FFF2-40B4-BE49-F238E27FC236}">
                 <a16:creationId xmlns:a16="http://schemas.microsoft.com/office/drawing/2014/main" id="{A80DC8F6-839C-067F-0B49-7F60E3B81FC8}"/>
               </a:ext>
             </a:extLst>
@@ -2028,7 +2357,7 @@
 </p:sld>
 </file>
 
-<file path=ppt/slides/slide14.xml><?xml version="1.0" encoding="utf-8"?>
+<file path=ppt/slides/slide18.xml><?xml version="1.0" encoding="utf-8"?>
 <p:sld xmlns:a="http://schemas.openxmlformats.org/drawingml/2006/main" xmlns:r="http://schemas.openxmlformats.org/officeDocument/2006/relationships" xmlns:p="http://schemas.openxmlformats.org/presentationml/2006/main">
   <p:cSld name="Slide 6">
     <p:bg>
@@ -3220,6 +3549,228 @@
 
 <file path=ppt/slides/slide2.xml><?xml version="1.0" encoding="utf-8"?>
 <p:sld xmlns:a="http://schemas.openxmlformats.org/drawingml/2006/main" xmlns:r="http://schemas.openxmlformats.org/officeDocument/2006/relationships" xmlns:p="http://schemas.openxmlformats.org/presentationml/2006/main">
+  <p:cSld>
+    <p:bg>
+      <p:bgPr>
+        <a:solidFill>
+          <a:srgbClr val="F6F4EF"/>
+        </a:solidFill>
+        <a:effectLst/>
+      </p:bgPr>
+    </p:bg>
+    <p:spTree>
+      <p:nvGrpSpPr>
+        <p:cNvPr id="1" name=""/>
+        <p:cNvGrpSpPr/>
+        <p:nvPr/>
+      </p:nvGrpSpPr>
+      <p:grpSpPr>
+        <a:xfrm>
+          <a:off x="0" y="0"/>
+          <a:ext cx="0" cy="0"/>
+          <a:chOff x="0" y="0"/>
+          <a:chExt cx="0" cy="0"/>
+        </a:xfrm>
+      </p:grpSpPr>
+      <p:sp>
+        <p:nvSpPr>
+          <p:cNvPr id="2" name="Text 4">
+            <a:extLst>
+              <a:ext uri="{FF2B5EF4-FFF2-40B4-BE49-F238E27FC236}">
+                <a16:creationId xmlns:a16="http://schemas.microsoft.com/office/drawing/2014/main" id="{2ECF0B9A-236A-7DBA-B7FD-FA483E662485}"/>
+              </a:ext>
+            </a:extLst>
+          </p:cNvPr>
+          <p:cNvSpPr/>
+          <p:nvPr/>
+        </p:nvSpPr>
+        <p:spPr>
+          <a:xfrm>
+            <a:off x="590550" y="975042"/>
+            <a:ext cx="16089630" cy="857568"/>
+          </a:xfrm>
+          <a:prstGeom prst="rect">
+            <a:avLst/>
+          </a:prstGeom>
+          <a:noFill/>
+          <a:ln/>
+        </p:spPr>
+        <p:txBody>
+          <a:bodyPr wrap="square" lIns="25400" tIns="25400" rIns="25400" bIns="25400" rtlCol="0" anchor="t">
+            <a:normAutofit lnSpcReduction="10000"/>
+          </a:bodyPr>
+          <a:lstStyle/>
+          <a:p>
+            <a:pPr marL="0" indent="0" algn="l">
+              <a:lnSpc>
+                <a:spcPct val="101996"/>
+              </a:lnSpc>
+              <a:buNone/>
+            </a:pPr>
+            <a:r>
+              <a:rPr lang="en-US" sz="5700" kern="0" spc="-85" dirty="0" err="1">
+                <a:solidFill>
+                  <a:srgbClr val="1A1A1A"/>
+                </a:solidFill>
+                <a:latin typeface="Georgia" pitchFamily="34" charset="0"/>
+                <a:ea typeface="Georgia" pitchFamily="34" charset="-122"/>
+                <a:cs typeface="Georgia" pitchFamily="34" charset="-120"/>
+              </a:rPr>
+              <a:t>Preguntas</a:t>
+            </a:r>
+            <a:r>
+              <a:rPr lang="en-US" sz="5700" kern="0" spc="-85" dirty="0">
+                <a:solidFill>
+                  <a:srgbClr val="1A1A1A"/>
+                </a:solidFill>
+                <a:latin typeface="Georgia" pitchFamily="34" charset="0"/>
+                <a:ea typeface="Georgia" pitchFamily="34" charset="-122"/>
+                <a:cs typeface="Georgia" pitchFamily="34" charset="-120"/>
+              </a:rPr>
+              <a:t> de </a:t>
+            </a:r>
+            <a:r>
+              <a:rPr lang="en-US" sz="5700" kern="0" spc="-85" dirty="0" err="1">
+                <a:solidFill>
+                  <a:srgbClr val="1A1A1A"/>
+                </a:solidFill>
+                <a:latin typeface="Georgia" pitchFamily="34" charset="0"/>
+                <a:ea typeface="Georgia" pitchFamily="34" charset="-122"/>
+                <a:cs typeface="Georgia" pitchFamily="34" charset="-120"/>
+              </a:rPr>
+              <a:t>Investigación</a:t>
+            </a:r>
+            <a:endParaRPr lang="en-US" sz="5700" dirty="0"/>
+          </a:p>
+        </p:txBody>
+      </p:sp>
+      <p:sp>
+        <p:nvSpPr>
+          <p:cNvPr id="4" name="CuadroTexto 3">
+            <a:extLst>
+              <a:ext uri="{FF2B5EF4-FFF2-40B4-BE49-F238E27FC236}">
+                <a16:creationId xmlns:a16="http://schemas.microsoft.com/office/drawing/2014/main" id="{09A1E89C-AD8D-1A1F-6742-FE0479950B3D}"/>
+              </a:ext>
+            </a:extLst>
+          </p:cNvPr>
+          <p:cNvSpPr txBox="1"/>
+          <p:nvPr/>
+        </p:nvSpPr>
+        <p:spPr>
+          <a:xfrm>
+            <a:off x="734289" y="2454716"/>
+            <a:ext cx="13328075" cy="1569660"/>
+          </a:xfrm>
+          <a:prstGeom prst="rect">
+            <a:avLst/>
+          </a:prstGeom>
+          <a:noFill/>
+        </p:spPr>
+        <p:txBody>
+          <a:bodyPr wrap="square">
+            <a:spAutoFit/>
+          </a:bodyPr>
+          <a:lstStyle/>
+          <a:p>
+            <a:r>
+              <a:rPr lang="es-MX" sz="3200" dirty="0">
+                <a:effectLst/>
+                <a:latin typeface="Times New Roman" panose="02020603050405020304" pitchFamily="18" charset="0"/>
+                <a:ea typeface="Times New Roman" panose="02020603050405020304" pitchFamily="18" charset="0"/>
+              </a:rPr>
+              <a:t>¿Es posible mejorar el servicio al cliente al identifica problemas que ocurren en las conversaciones de servicio al cliente a partir del análisis de sentimiento y tono de los mensajes de WhatsApp?</a:t>
+            </a:r>
+            <a:endParaRPr lang="es-MX" sz="3200" dirty="0"/>
+          </a:p>
+        </p:txBody>
+      </p:sp>
+      <p:sp>
+        <p:nvSpPr>
+          <p:cNvPr id="6" name="CuadroTexto 5">
+            <a:extLst>
+              <a:ext uri="{FF2B5EF4-FFF2-40B4-BE49-F238E27FC236}">
+                <a16:creationId xmlns:a16="http://schemas.microsoft.com/office/drawing/2014/main" id="{710D7A8D-E134-04DE-540F-AF3AEC60ECAD}"/>
+              </a:ext>
+            </a:extLst>
+          </p:cNvPr>
+          <p:cNvSpPr txBox="1"/>
+          <p:nvPr/>
+        </p:nvSpPr>
+        <p:spPr>
+          <a:xfrm>
+            <a:off x="828673" y="4853923"/>
+            <a:ext cx="13139305" cy="1569660"/>
+          </a:xfrm>
+          <a:prstGeom prst="rect">
+            <a:avLst/>
+          </a:prstGeom>
+          <a:noFill/>
+        </p:spPr>
+        <p:txBody>
+          <a:bodyPr wrap="square">
+            <a:spAutoFit/>
+          </a:bodyPr>
+          <a:lstStyle/>
+          <a:p>
+            <a:r>
+              <a:rPr lang="es-MX" sz="3200" dirty="0">
+                <a:effectLst/>
+                <a:latin typeface="Times New Roman" panose="02020603050405020304" pitchFamily="18" charset="0"/>
+                <a:ea typeface="Times New Roman" panose="02020603050405020304" pitchFamily="18" charset="0"/>
+              </a:rPr>
+              <a:t>¿Es posible construir un modelo de minería de texto que clasifique cada conversación a partir de los </a:t>
+            </a:r>
+            <a:r>
+              <a:rPr lang="es-MX" sz="3200" dirty="0" err="1">
+                <a:effectLst/>
+                <a:latin typeface="Times New Roman" panose="02020603050405020304" pitchFamily="18" charset="0"/>
+                <a:ea typeface="Times New Roman" panose="02020603050405020304" pitchFamily="18" charset="0"/>
+              </a:rPr>
+              <a:t>unigramas</a:t>
+            </a:r>
+            <a:r>
+              <a:rPr lang="es-MX" sz="3200" dirty="0">
+                <a:effectLst/>
+                <a:latin typeface="Times New Roman" panose="02020603050405020304" pitchFamily="18" charset="0"/>
+                <a:ea typeface="Times New Roman" panose="02020603050405020304" pitchFamily="18" charset="0"/>
+              </a:rPr>
+              <a:t> y </a:t>
+            </a:r>
+            <a:r>
+              <a:rPr lang="es-MX" sz="3200" dirty="0" err="1">
+                <a:effectLst/>
+                <a:latin typeface="Times New Roman" panose="02020603050405020304" pitchFamily="18" charset="0"/>
+                <a:ea typeface="Times New Roman" panose="02020603050405020304" pitchFamily="18" charset="0"/>
+              </a:rPr>
+              <a:t>bigramas</a:t>
+            </a:r>
+            <a:r>
+              <a:rPr lang="es-MX" sz="3200" dirty="0">
+                <a:effectLst/>
+                <a:latin typeface="Times New Roman" panose="02020603050405020304" pitchFamily="18" charset="0"/>
+                <a:ea typeface="Times New Roman" panose="02020603050405020304" pitchFamily="18" charset="0"/>
+              </a:rPr>
+              <a:t> utilizados en las conversaciones?</a:t>
+            </a:r>
+            <a:endParaRPr lang="es-MX" sz="3200" dirty="0"/>
+          </a:p>
+        </p:txBody>
+      </p:sp>
+    </p:spTree>
+    <p:extLst>
+      <p:ext uri="{BB962C8B-B14F-4D97-AF65-F5344CB8AC3E}">
+        <p14:creationId xmlns:p14="http://schemas.microsoft.com/office/powerpoint/2010/main" val="3874808514"/>
+      </p:ext>
+    </p:extLst>
+  </p:cSld>
+  <p:clrMapOvr>
+    <a:masterClrMapping/>
+  </p:clrMapOvr>
+</p:sld>
+</file>
+
+<file path=ppt/slides/slide3.xml><?xml version="1.0" encoding="utf-8"?>
+<p:sld xmlns:a="http://schemas.openxmlformats.org/drawingml/2006/main" xmlns:r="http://schemas.openxmlformats.org/officeDocument/2006/relationships" xmlns:p="http://schemas.openxmlformats.org/presentationml/2006/main">
   <p:cSld name="Slide 2">
     <p:bg>
       <p:bgPr>
@@ -6442,7 +6993,413 @@
 </p:sld>
 </file>
 
-<file path=ppt/slides/slide3.xml><?xml version="1.0" encoding="utf-8"?>
+<file path=ppt/slides/slide4.xml><?xml version="1.0" encoding="utf-8"?>
+<p:sld xmlns:a="http://schemas.openxmlformats.org/drawingml/2006/main" xmlns:r="http://schemas.openxmlformats.org/officeDocument/2006/relationships" xmlns:p="http://schemas.openxmlformats.org/presentationml/2006/main">
+  <p:cSld>
+    <p:bg>
+      <p:bgPr>
+        <a:solidFill>
+          <a:srgbClr val="F6F4EF"/>
+        </a:solidFill>
+        <a:effectLst/>
+      </p:bgPr>
+    </p:bg>
+    <p:spTree>
+      <p:nvGrpSpPr>
+        <p:cNvPr id="1" name=""/>
+        <p:cNvGrpSpPr/>
+        <p:nvPr/>
+      </p:nvGrpSpPr>
+      <p:grpSpPr>
+        <a:xfrm>
+          <a:off x="0" y="0"/>
+          <a:ext cx="0" cy="0"/>
+          <a:chOff x="0" y="0"/>
+          <a:chExt cx="0" cy="0"/>
+        </a:xfrm>
+      </p:grpSpPr>
+      <p:pic>
+        <p:nvPicPr>
+          <p:cNvPr id="3" name="Imagen 2">
+            <a:extLst>
+              <a:ext uri="{FF2B5EF4-FFF2-40B4-BE49-F238E27FC236}">
+                <a16:creationId xmlns:a16="http://schemas.microsoft.com/office/drawing/2014/main" id="{63704F80-60A7-125B-2249-63D54760503D}"/>
+              </a:ext>
+            </a:extLst>
+          </p:cNvPr>
+          <p:cNvPicPr>
+            <a:picLocks noChangeAspect="1"/>
+          </p:cNvPicPr>
+          <p:nvPr/>
+        </p:nvPicPr>
+        <p:blipFill>
+          <a:blip r:embed="rId2"/>
+          <a:stretch>
+            <a:fillRect/>
+          </a:stretch>
+        </p:blipFill>
+        <p:spPr>
+          <a:xfrm>
+            <a:off x="893382" y="2900363"/>
+            <a:ext cx="16501235" cy="4095958"/>
+          </a:xfrm>
+          <a:prstGeom prst="rect">
+            <a:avLst/>
+          </a:prstGeom>
+        </p:spPr>
+      </p:pic>
+      <p:sp>
+        <p:nvSpPr>
+          <p:cNvPr id="4" name="Text 4">
+            <a:extLst>
+              <a:ext uri="{FF2B5EF4-FFF2-40B4-BE49-F238E27FC236}">
+                <a16:creationId xmlns:a16="http://schemas.microsoft.com/office/drawing/2014/main" id="{7A8B8173-2718-6328-9991-F19CF6A754DD}"/>
+              </a:ext>
+            </a:extLst>
+          </p:cNvPr>
+          <p:cNvSpPr/>
+          <p:nvPr/>
+        </p:nvSpPr>
+        <p:spPr>
+          <a:xfrm>
+            <a:off x="590550" y="975042"/>
+            <a:ext cx="16089630" cy="857568"/>
+          </a:xfrm>
+          <a:prstGeom prst="rect">
+            <a:avLst/>
+          </a:prstGeom>
+          <a:noFill/>
+          <a:ln/>
+        </p:spPr>
+        <p:txBody>
+          <a:bodyPr wrap="square" lIns="25400" tIns="25400" rIns="25400" bIns="25400" rtlCol="0" anchor="t">
+            <a:normAutofit lnSpcReduction="10000"/>
+          </a:bodyPr>
+          <a:lstStyle/>
+          <a:p>
+            <a:pPr marL="0" indent="0" algn="l">
+              <a:lnSpc>
+                <a:spcPct val="101996"/>
+              </a:lnSpc>
+              <a:buNone/>
+            </a:pPr>
+            <a:r>
+              <a:rPr lang="en-US" sz="5700" kern="0" spc="-85" dirty="0" err="1">
+                <a:solidFill>
+                  <a:srgbClr val="1A1A1A"/>
+                </a:solidFill>
+                <a:latin typeface="Georgia" pitchFamily="34" charset="0"/>
+                <a:ea typeface="Georgia" pitchFamily="34" charset="-122"/>
+                <a:cs typeface="Georgia" pitchFamily="34" charset="-120"/>
+              </a:rPr>
+              <a:t>Preprocesamiento</a:t>
+            </a:r>
+            <a:endParaRPr lang="en-US" sz="5700" dirty="0"/>
+          </a:p>
+        </p:txBody>
+      </p:sp>
+    </p:spTree>
+    <p:extLst>
+      <p:ext uri="{BB962C8B-B14F-4D97-AF65-F5344CB8AC3E}">
+        <p14:creationId xmlns:p14="http://schemas.microsoft.com/office/powerpoint/2010/main" val="1706706350"/>
+      </p:ext>
+    </p:extLst>
+  </p:cSld>
+  <p:clrMapOvr>
+    <a:masterClrMapping/>
+  </p:clrMapOvr>
+</p:sld>
+</file>
+
+<file path=ppt/slides/slide5.xml><?xml version="1.0" encoding="utf-8"?>
+<p:sld xmlns:a="http://schemas.openxmlformats.org/drawingml/2006/main" xmlns:r="http://schemas.openxmlformats.org/officeDocument/2006/relationships" xmlns:p="http://schemas.openxmlformats.org/presentationml/2006/main">
+  <p:cSld>
+    <p:bg>
+      <p:bgPr>
+        <a:solidFill>
+          <a:srgbClr val="F6F4EF"/>
+        </a:solidFill>
+        <a:effectLst/>
+      </p:bgPr>
+    </p:bg>
+    <p:spTree>
+      <p:nvGrpSpPr>
+        <p:cNvPr id="1" name=""/>
+        <p:cNvGrpSpPr/>
+        <p:nvPr/>
+      </p:nvGrpSpPr>
+      <p:grpSpPr>
+        <a:xfrm>
+          <a:off x="0" y="0"/>
+          <a:ext cx="0" cy="0"/>
+          <a:chOff x="0" y="0"/>
+          <a:chExt cx="0" cy="0"/>
+        </a:xfrm>
+      </p:grpSpPr>
+      <p:pic>
+        <p:nvPicPr>
+          <p:cNvPr id="3" name="Imagen 2">
+            <a:extLst>
+              <a:ext uri="{FF2B5EF4-FFF2-40B4-BE49-F238E27FC236}">
+                <a16:creationId xmlns:a16="http://schemas.microsoft.com/office/drawing/2014/main" id="{EBB32703-C8FE-03EF-B41C-251BF29756E5}"/>
+              </a:ext>
+            </a:extLst>
+          </p:cNvPr>
+          <p:cNvPicPr>
+            <a:picLocks noChangeAspect="1"/>
+          </p:cNvPicPr>
+          <p:nvPr/>
+        </p:nvPicPr>
+        <p:blipFill>
+          <a:blip r:embed="rId2"/>
+          <a:stretch>
+            <a:fillRect/>
+          </a:stretch>
+        </p:blipFill>
+        <p:spPr>
+          <a:xfrm>
+            <a:off x="1435357" y="2893378"/>
+            <a:ext cx="13223618" cy="4957444"/>
+          </a:xfrm>
+          <a:prstGeom prst="rect">
+            <a:avLst/>
+          </a:prstGeom>
+        </p:spPr>
+      </p:pic>
+      <p:sp>
+        <p:nvSpPr>
+          <p:cNvPr id="4" name="Text 4">
+            <a:extLst>
+              <a:ext uri="{FF2B5EF4-FFF2-40B4-BE49-F238E27FC236}">
+                <a16:creationId xmlns:a16="http://schemas.microsoft.com/office/drawing/2014/main" id="{58F08A40-9ECE-FEEE-C3ED-D66822A979AF}"/>
+              </a:ext>
+            </a:extLst>
+          </p:cNvPr>
+          <p:cNvSpPr/>
+          <p:nvPr/>
+        </p:nvSpPr>
+        <p:spPr>
+          <a:xfrm>
+            <a:off x="590550" y="975042"/>
+            <a:ext cx="16089630" cy="857568"/>
+          </a:xfrm>
+          <a:prstGeom prst="rect">
+            <a:avLst/>
+          </a:prstGeom>
+          <a:noFill/>
+          <a:ln/>
+        </p:spPr>
+        <p:txBody>
+          <a:bodyPr wrap="square" lIns="25400" tIns="25400" rIns="25400" bIns="25400" rtlCol="0" anchor="t">
+            <a:normAutofit lnSpcReduction="10000"/>
+          </a:bodyPr>
+          <a:lstStyle/>
+          <a:p>
+            <a:pPr marL="0" indent="0" algn="l">
+              <a:lnSpc>
+                <a:spcPct val="101996"/>
+              </a:lnSpc>
+              <a:buNone/>
+            </a:pPr>
+            <a:r>
+              <a:rPr lang="en-US" sz="5700" kern="0" spc="-85" dirty="0" err="1">
+                <a:solidFill>
+                  <a:srgbClr val="1A1A1A"/>
+                </a:solidFill>
+                <a:latin typeface="Georgia" pitchFamily="34" charset="0"/>
+                <a:ea typeface="Georgia" pitchFamily="34" charset="-122"/>
+                <a:cs typeface="Georgia" pitchFamily="34" charset="-120"/>
+              </a:rPr>
+              <a:t>BoW</a:t>
+            </a:r>
+            <a:r>
+              <a:rPr lang="en-US" sz="5700" kern="0" spc="-85" dirty="0">
+                <a:solidFill>
+                  <a:srgbClr val="1A1A1A"/>
+                </a:solidFill>
+                <a:latin typeface="Georgia" pitchFamily="34" charset="0"/>
+                <a:ea typeface="Georgia" pitchFamily="34" charset="-122"/>
+                <a:cs typeface="Georgia" pitchFamily="34" charset="-120"/>
+              </a:rPr>
+              <a:t>/TFIDF</a:t>
+            </a:r>
+            <a:endParaRPr lang="en-US" sz="5700" dirty="0"/>
+          </a:p>
+        </p:txBody>
+      </p:sp>
+      <p:pic>
+        <p:nvPicPr>
+          <p:cNvPr id="6" name="Imagen 5">
+            <a:extLst>
+              <a:ext uri="{FF2B5EF4-FFF2-40B4-BE49-F238E27FC236}">
+                <a16:creationId xmlns:a16="http://schemas.microsoft.com/office/drawing/2014/main" id="{16722D4B-CF76-F10D-7F97-C283A68FA586}"/>
+              </a:ext>
+            </a:extLst>
+          </p:cNvPr>
+          <p:cNvPicPr>
+            <a:picLocks noChangeAspect="1"/>
+          </p:cNvPicPr>
+          <p:nvPr/>
+        </p:nvPicPr>
+        <p:blipFill>
+          <a:blip r:embed="rId3"/>
+          <a:stretch>
+            <a:fillRect/>
+          </a:stretch>
+        </p:blipFill>
+        <p:spPr>
+          <a:xfrm>
+            <a:off x="136855" y="1956943"/>
+            <a:ext cx="18014289" cy="6373114"/>
+          </a:xfrm>
+          <a:prstGeom prst="rect">
+            <a:avLst/>
+          </a:prstGeom>
+        </p:spPr>
+      </p:pic>
+    </p:spTree>
+    <p:extLst>
+      <p:ext uri="{BB962C8B-B14F-4D97-AF65-F5344CB8AC3E}">
+        <p14:creationId xmlns:p14="http://schemas.microsoft.com/office/powerpoint/2010/main" val="2713722008"/>
+      </p:ext>
+    </p:extLst>
+  </p:cSld>
+  <p:clrMapOvr>
+    <a:masterClrMapping/>
+  </p:clrMapOvr>
+</p:sld>
+</file>
+
+<file path=ppt/slides/slide6.xml><?xml version="1.0" encoding="utf-8"?>
+<p:sld xmlns:a="http://schemas.openxmlformats.org/drawingml/2006/main" xmlns:r="http://schemas.openxmlformats.org/officeDocument/2006/relationships" xmlns:p="http://schemas.openxmlformats.org/presentationml/2006/main">
+  <p:cSld>
+    <p:bg>
+      <p:bgPr>
+        <a:solidFill>
+          <a:srgbClr val="F6F4EF"/>
+        </a:solidFill>
+        <a:effectLst/>
+      </p:bgPr>
+    </p:bg>
+    <p:spTree>
+      <p:nvGrpSpPr>
+        <p:cNvPr id="1" name=""/>
+        <p:cNvGrpSpPr/>
+        <p:nvPr/>
+      </p:nvGrpSpPr>
+      <p:grpSpPr>
+        <a:xfrm>
+          <a:off x="0" y="0"/>
+          <a:ext cx="0" cy="0"/>
+          <a:chOff x="0" y="0"/>
+          <a:chExt cx="0" cy="0"/>
+        </a:xfrm>
+      </p:grpSpPr>
+      <p:pic>
+        <p:nvPicPr>
+          <p:cNvPr id="3" name="Imagen 2">
+            <a:extLst>
+              <a:ext uri="{FF2B5EF4-FFF2-40B4-BE49-F238E27FC236}">
+                <a16:creationId xmlns:a16="http://schemas.microsoft.com/office/drawing/2014/main" id="{2EF3823A-52DE-4E69-9018-62E81004B827}"/>
+              </a:ext>
+            </a:extLst>
+          </p:cNvPr>
+          <p:cNvPicPr>
+            <a:picLocks noChangeAspect="1"/>
+          </p:cNvPicPr>
+          <p:nvPr/>
+        </p:nvPicPr>
+        <p:blipFill>
+          <a:blip r:embed="rId2"/>
+          <a:stretch>
+            <a:fillRect/>
+          </a:stretch>
+        </p:blipFill>
+        <p:spPr>
+          <a:xfrm>
+            <a:off x="6657976" y="2384473"/>
+            <a:ext cx="5392737" cy="6747462"/>
+          </a:xfrm>
+          <a:prstGeom prst="rect">
+            <a:avLst/>
+          </a:prstGeom>
+        </p:spPr>
+      </p:pic>
+      <p:sp>
+        <p:nvSpPr>
+          <p:cNvPr id="4" name="Text 4">
+            <a:extLst>
+              <a:ext uri="{FF2B5EF4-FFF2-40B4-BE49-F238E27FC236}">
+                <a16:creationId xmlns:a16="http://schemas.microsoft.com/office/drawing/2014/main" id="{D723FE50-5FF3-415C-CD2E-A73CB83B3132}"/>
+              </a:ext>
+            </a:extLst>
+          </p:cNvPr>
+          <p:cNvSpPr/>
+          <p:nvPr/>
+        </p:nvSpPr>
+        <p:spPr>
+          <a:xfrm>
+            <a:off x="590550" y="975042"/>
+            <a:ext cx="16089630" cy="857568"/>
+          </a:xfrm>
+          <a:prstGeom prst="rect">
+            <a:avLst/>
+          </a:prstGeom>
+          <a:noFill/>
+          <a:ln/>
+        </p:spPr>
+        <p:txBody>
+          <a:bodyPr wrap="square" lIns="25400" tIns="25400" rIns="25400" bIns="25400" rtlCol="0" anchor="t">
+            <a:normAutofit lnSpcReduction="10000"/>
+          </a:bodyPr>
+          <a:lstStyle/>
+          <a:p>
+            <a:pPr marL="0" indent="0" algn="l">
+              <a:lnSpc>
+                <a:spcPct val="101996"/>
+              </a:lnSpc>
+              <a:buNone/>
+            </a:pPr>
+            <a:r>
+              <a:rPr lang="en-US" sz="5700" kern="0" spc="-85" dirty="0" err="1">
+                <a:solidFill>
+                  <a:srgbClr val="1A1A1A"/>
+                </a:solidFill>
+                <a:latin typeface="Georgia" pitchFamily="34" charset="0"/>
+                <a:ea typeface="Georgia" pitchFamily="34" charset="-122"/>
+                <a:cs typeface="Georgia" pitchFamily="34" charset="-120"/>
+              </a:rPr>
+              <a:t>Diccionario</a:t>
+            </a:r>
+            <a:r>
+              <a:rPr lang="en-US" sz="5700" kern="0" spc="-85" dirty="0">
+                <a:solidFill>
+                  <a:srgbClr val="1A1A1A"/>
+                </a:solidFill>
+                <a:latin typeface="Georgia" pitchFamily="34" charset="0"/>
+                <a:ea typeface="Georgia" pitchFamily="34" charset="-122"/>
+                <a:cs typeface="Georgia" pitchFamily="34" charset="-120"/>
+              </a:rPr>
+              <a:t> de Dominio</a:t>
+            </a:r>
+            <a:endParaRPr lang="en-US" sz="5700" dirty="0"/>
+          </a:p>
+        </p:txBody>
+      </p:sp>
+    </p:spTree>
+    <p:extLst>
+      <p:ext uri="{BB962C8B-B14F-4D97-AF65-F5344CB8AC3E}">
+        <p14:creationId xmlns:p14="http://schemas.microsoft.com/office/powerpoint/2010/main" val="2225530223"/>
+      </p:ext>
+    </p:extLst>
+  </p:cSld>
+  <p:clrMapOvr>
+    <a:masterClrMapping/>
+  </p:clrMapOvr>
+</p:sld>
+</file>
+
+<file path=ppt/slides/slide7.xml><?xml version="1.0" encoding="utf-8"?>
 <p:sld xmlns:a="http://schemas.openxmlformats.org/drawingml/2006/main" xmlns:r="http://schemas.openxmlformats.org/officeDocument/2006/relationships" xmlns:p="http://schemas.openxmlformats.org/presentationml/2006/main">
   <p:cSld name="Slide 3">
     <p:bg>
@@ -6762,10 +7719,8 @@
                   <a:srgbClr val="1A1A1A"/>
                 </a:solidFill>
                 <a:latin typeface="Georgia" pitchFamily="34" charset="0"/>
-                <a:ea typeface="Georgia" pitchFamily="34" charset="-122"/>
-                <a:cs typeface="Georgia" pitchFamily="34" charset="-120"/>
-              </a:rPr>
-              <a:t>pago</a:t>
+              </a:rPr>
+              <a:t>favor</a:t>
             </a:r>
             <a:endParaRPr lang="en-US" sz="2850" dirty="0"/>
           </a:p>
@@ -6948,7 +7903,7 @@
               <a:buNone/>
             </a:pPr>
             <a:r>
-              <a:rPr lang="en-US" sz="2850" kern="0" spc="-29" dirty="0">
+              <a:rPr lang="en-US" sz="2850" kern="0" spc="-29" dirty="0" err="1">
                 <a:solidFill>
                   <a:srgbClr val="1A1A1A"/>
                 </a:solidFill>
@@ -6956,7 +7911,7 @@
                 <a:ea typeface="Georgia" pitchFamily="34" charset="-122"/>
                 <a:cs typeface="Georgia" pitchFamily="34" charset="-120"/>
               </a:rPr>
-              <a:t>pedido</a:t>
+              <a:t>papelería</a:t>
             </a:r>
             <a:endParaRPr lang="en-US" sz="2850" dirty="0"/>
           </a:p>
@@ -7139,7 +8094,7 @@
               <a:buNone/>
             </a:pPr>
             <a:r>
-              <a:rPr lang="en-US" sz="2850" kern="0" spc="-29" dirty="0">
+              <a:rPr lang="en-US" sz="2850" kern="0" spc="-29" dirty="0" err="1">
                 <a:solidFill>
                   <a:srgbClr val="1A1A1A"/>
                 </a:solidFill>
@@ -7147,7 +8102,7 @@
                 <a:ea typeface="Georgia" pitchFamily="34" charset="-122"/>
                 <a:cs typeface="Georgia" pitchFamily="34" charset="-120"/>
               </a:rPr>
-              <a:t>factura</a:t>
+              <a:t>pago</a:t>
             </a:r>
             <a:endParaRPr lang="en-US" sz="2850" dirty="0"/>
           </a:p>
@@ -7330,7 +8285,7 @@
               <a:buNone/>
             </a:pPr>
             <a:r>
-              <a:rPr lang="en-US" sz="2850" kern="0" spc="-29" dirty="0">
+              <a:rPr lang="en-US" sz="2850" kern="0" spc="-29" dirty="0" err="1">
                 <a:solidFill>
                   <a:srgbClr val="1A1A1A"/>
                 </a:solidFill>
@@ -7338,7 +8293,7 @@
                 <a:ea typeface="Georgia" pitchFamily="34" charset="-122"/>
                 <a:cs typeface="Georgia" pitchFamily="34" charset="-120"/>
               </a:rPr>
-              <a:t>cotización</a:t>
+              <a:t>pedido</a:t>
             </a:r>
             <a:endParaRPr lang="en-US" sz="2850" dirty="0"/>
           </a:p>
@@ -7529,7 +8484,7 @@
                 <a:ea typeface="Georgia" pitchFamily="34" charset="-122"/>
                 <a:cs typeface="Georgia" pitchFamily="34" charset="-120"/>
               </a:rPr>
-              <a:t>orden</a:t>
+              <a:t>factura</a:t>
             </a:r>
             <a:endParaRPr lang="en-US" sz="2850" dirty="0"/>
           </a:p>
@@ -8465,7 +9420,7 @@
 </p:sld>
 </file>
 
-<file path=ppt/slides/slide4.xml><?xml version="1.0" encoding="utf-8"?>
+<file path=ppt/slides/slide8.xml><?xml version="1.0" encoding="utf-8"?>
 <p:sld xmlns:a="http://schemas.openxmlformats.org/drawingml/2006/main" xmlns:r="http://schemas.openxmlformats.org/officeDocument/2006/relationships" xmlns:p="http://schemas.openxmlformats.org/presentationml/2006/main">
   <p:cSld name="Slide 4">
     <p:bg>
@@ -8653,14 +9608,14 @@
       </p:sp>
       <p:sp>
         <p:nvSpPr>
-          <p:cNvPr id="6" name="Text 4"/>
-          <p:cNvSpPr/>
-          <p:nvPr/>
-        </p:nvSpPr>
-        <p:spPr>
-          <a:xfrm>
-            <a:off x="1047750" y="1832610"/>
-            <a:ext cx="16089630" cy="857568"/>
+          <p:cNvPr id="7" name="Text 5"/>
+          <p:cNvSpPr/>
+          <p:nvPr/>
+        </p:nvSpPr>
+        <p:spPr>
+          <a:xfrm>
+            <a:off x="1047750" y="2203168"/>
+            <a:ext cx="14716125" cy="952500"/>
           </a:xfrm>
           <a:prstGeom prst="rect">
             <a:avLst/>
@@ -8670,84 +9625,51 @@
         </p:spPr>
         <p:txBody>
           <a:bodyPr wrap="square" lIns="25400" tIns="25400" rIns="25400" bIns="25400" rtlCol="0" anchor="t">
-            <a:normAutofit lnSpcReduction="10000"/>
-          </a:bodyPr>
-          <a:lstStyle/>
-          <a:p>
-            <a:pPr marL="0" indent="0" algn="l">
-              <a:lnSpc>
-                <a:spcPct val="101996"/>
-              </a:lnSpc>
-              <a:buNone/>
-            </a:pPr>
-            <a:r>
-              <a:rPr lang="en-US" sz="5700" kern="0" spc="-85" dirty="0">
-                <a:solidFill>
-                  <a:srgbClr val="1A1A1A"/>
+            <a:normAutofit fontScale="92500" lnSpcReduction="20000"/>
+          </a:bodyPr>
+          <a:lstStyle/>
+          <a:p>
+            <a:pPr marL="0" indent="0" algn="l">
+              <a:lnSpc>
+                <a:spcPct val="120000"/>
+              </a:lnSpc>
+              <a:buNone/>
+            </a:pPr>
+            <a:r>
+              <a:rPr lang="en-US" sz="3000" i="1" dirty="0">
+                <a:solidFill>
+                  <a:srgbClr val="2B2723"/>
                 </a:solidFill>
                 <a:latin typeface="Georgia" pitchFamily="34" charset="0"/>
                 <a:ea typeface="Georgia" pitchFamily="34" charset="-122"/>
                 <a:cs typeface="Georgia" pitchFamily="34" charset="-120"/>
               </a:rPr>
-              <a:t>Cuatro </a:t>
-            </a:r>
-            <a:r>
-              <a:rPr lang="en-US" sz="5700" i="1" kern="0" spc="-85" dirty="0">
-                <a:solidFill>
-                  <a:srgbClr val="D14B3D"/>
+              <a:t>Clustering sobre TF‑IDF separa los chats </a:t>
+            </a:r>
+            <a:r>
+              <a:rPr lang="en-US" sz="3000" i="1" dirty="0" err="1">
+                <a:solidFill>
+                  <a:srgbClr val="2B2723"/>
                 </a:solidFill>
                 <a:latin typeface="Georgia" pitchFamily="34" charset="0"/>
                 <a:ea typeface="Georgia" pitchFamily="34" charset="-122"/>
                 <a:cs typeface="Georgia" pitchFamily="34" charset="-120"/>
               </a:rPr>
-              <a:t>intenciones</a:t>
-            </a:r>
-            <a:r>
-              <a:rPr lang="en-US" sz="5700" kern="0" spc="-85" dirty="0">
-                <a:solidFill>
-                  <a:srgbClr val="1A1A1A"/>
+              <a:t>en</a:t>
+            </a:r>
+            <a:r>
+              <a:rPr lang="en-US" sz="3000" i="1" dirty="0">
+                <a:solidFill>
+                  <a:srgbClr val="2B2723"/>
                 </a:solidFill>
                 <a:latin typeface="Georgia" pitchFamily="34" charset="0"/>
                 <a:ea typeface="Georgia" pitchFamily="34" charset="-122"/>
                 <a:cs typeface="Georgia" pitchFamily="34" charset="-120"/>
               </a:rPr>
-              <a:t>, una conversación</a:t>
-            </a:r>
-            <a:endParaRPr lang="en-US" sz="5700" dirty="0"/>
-          </a:p>
-        </p:txBody>
-      </p:sp>
-      <p:sp>
-        <p:nvSpPr>
-          <p:cNvPr id="7" name="Text 5"/>
-          <p:cNvSpPr/>
-          <p:nvPr/>
-        </p:nvSpPr>
-        <p:spPr>
-          <a:xfrm>
-            <a:off x="1047750" y="2899728"/>
-            <a:ext cx="14716125" cy="952500"/>
-          </a:xfrm>
-          <a:prstGeom prst="rect">
-            <a:avLst/>
-          </a:prstGeom>
-          <a:noFill/>
-          <a:ln/>
-        </p:spPr>
-        <p:txBody>
-          <a:bodyPr wrap="square" lIns="25400" tIns="25400" rIns="25400" bIns="25400" rtlCol="0" anchor="t">
-            <a:normAutofit fontScale="92500" lnSpcReduction="20000"/>
-          </a:bodyPr>
-          <a:lstStyle/>
-          <a:p>
-            <a:pPr marL="0" indent="0" algn="l">
-              <a:lnSpc>
-                <a:spcPct val="120000"/>
-              </a:lnSpc>
-              <a:buNone/>
-            </a:pPr>
-            <a:r>
-              <a:rPr lang="en-US" sz="3000" i="1" dirty="0">
+              <a:t> </a:t>
+            </a:r>
+            <a:r>
+              <a:rPr lang="en-US" sz="3000" i="1" dirty="0" err="1">
                 <a:solidFill>
                   <a:srgbClr val="2B2723"/>
                 </a:solidFill>
@@ -8755,7 +9677,18 @@
                 <a:ea typeface="Georgia" pitchFamily="34" charset="-122"/>
                 <a:cs typeface="Georgia" pitchFamily="34" charset="-120"/>
               </a:rPr>
-              <a:t>Clustering sobre TF‑IDF separa los chats en cuatro categorías estables y mutuamente excluyentes.</a:t>
+              <a:t>nueve</a:t>
+            </a:r>
+            <a:r>
+              <a:rPr lang="en-US" sz="3000" i="1" dirty="0">
+                <a:solidFill>
+                  <a:srgbClr val="2B2723"/>
+                </a:solidFill>
+                <a:latin typeface="Georgia" pitchFamily="34" charset="0"/>
+                <a:ea typeface="Georgia" pitchFamily="34" charset="-122"/>
+                <a:cs typeface="Georgia" pitchFamily="34" charset="-120"/>
+              </a:rPr>
+              <a:t> categorías estables y mutuamente excluyentes.</a:t>
             </a:r>
             <a:endParaRPr lang="en-US" sz="3000" dirty="0"/>
           </a:p>
@@ -9951,7 +10884,7 @@
 </p:sld>
 </file>
 
-<file path=ppt/slides/slide5.xml><?xml version="1.0" encoding="utf-8"?>
+<file path=ppt/slides/slide9.xml><?xml version="1.0" encoding="utf-8"?>
 <p:sld xmlns:a="http://schemas.openxmlformats.org/drawingml/2006/main" xmlns:r="http://schemas.openxmlformats.org/officeDocument/2006/relationships" xmlns:p="http://schemas.openxmlformats.org/presentationml/2006/main">
   <p:cSld name="Slide 5">
     <p:bg>
@@ -11906,254 +12839,6 @@
         </p:txBody>
       </p:sp>
     </p:spTree>
-  </p:cSld>
-  <p:clrMapOvr>
-    <a:masterClrMapping/>
-  </p:clrMapOvr>
-</p:sld>
-</file>
-
-<file path=ppt/slides/slide6.xml><?xml version="1.0" encoding="utf-8"?>
-<p:sld xmlns:a="http://schemas.openxmlformats.org/drawingml/2006/main" xmlns:r="http://schemas.openxmlformats.org/officeDocument/2006/relationships" xmlns:p="http://schemas.openxmlformats.org/presentationml/2006/main">
-  <p:cSld>
-    <p:spTree>
-      <p:nvGrpSpPr>
-        <p:cNvPr id="1" name=""/>
-        <p:cNvGrpSpPr/>
-        <p:nvPr/>
-      </p:nvGrpSpPr>
-      <p:grpSpPr>
-        <a:xfrm>
-          <a:off x="0" y="0"/>
-          <a:ext cx="0" cy="0"/>
-          <a:chOff x="0" y="0"/>
-          <a:chExt cx="0" cy="0"/>
-        </a:xfrm>
-      </p:grpSpPr>
-      <p:pic>
-        <p:nvPicPr>
-          <p:cNvPr id="3" name="Imagen 2">
-            <a:extLst>
-              <a:ext uri="{FF2B5EF4-FFF2-40B4-BE49-F238E27FC236}">
-                <a16:creationId xmlns:a16="http://schemas.microsoft.com/office/drawing/2014/main" id="{EC848306-1C4F-34F1-8F75-05589E7875B7}"/>
-              </a:ext>
-            </a:extLst>
-          </p:cNvPr>
-          <p:cNvPicPr>
-            <a:picLocks noChangeAspect="1"/>
-          </p:cNvPicPr>
-          <p:nvPr/>
-        </p:nvPicPr>
-        <p:blipFill>
-          <a:blip r:embed="rId2"/>
-          <a:stretch>
-            <a:fillRect/>
-          </a:stretch>
-        </p:blipFill>
-        <p:spPr>
-          <a:xfrm>
-            <a:off x="1551515" y="1318678"/>
-            <a:ext cx="15184969" cy="7649643"/>
-          </a:xfrm>
-          <a:prstGeom prst="rect">
-            <a:avLst/>
-          </a:prstGeom>
-        </p:spPr>
-      </p:pic>
-    </p:spTree>
-    <p:extLst>
-      <p:ext uri="{BB962C8B-B14F-4D97-AF65-F5344CB8AC3E}">
-        <p14:creationId xmlns:p14="http://schemas.microsoft.com/office/powerpoint/2010/main" val="2727827770"/>
-      </p:ext>
-    </p:extLst>
-  </p:cSld>
-  <p:clrMapOvr>
-    <a:masterClrMapping/>
-  </p:clrMapOvr>
-</p:sld>
-</file>
-
-<file path=ppt/slides/slide7.xml><?xml version="1.0" encoding="utf-8"?>
-<p:sld xmlns:a="http://schemas.openxmlformats.org/drawingml/2006/main" xmlns:r="http://schemas.openxmlformats.org/officeDocument/2006/relationships" xmlns:p="http://schemas.openxmlformats.org/presentationml/2006/main">
-  <p:cSld>
-    <p:spTree>
-      <p:nvGrpSpPr>
-        <p:cNvPr id="1" name=""/>
-        <p:cNvGrpSpPr/>
-        <p:nvPr/>
-      </p:nvGrpSpPr>
-      <p:grpSpPr>
-        <a:xfrm>
-          <a:off x="0" y="0"/>
-          <a:ext cx="0" cy="0"/>
-          <a:chOff x="0" y="0"/>
-          <a:chExt cx="0" cy="0"/>
-        </a:xfrm>
-      </p:grpSpPr>
-      <p:pic>
-        <p:nvPicPr>
-          <p:cNvPr id="3" name="Imagen 2">
-            <a:extLst>
-              <a:ext uri="{FF2B5EF4-FFF2-40B4-BE49-F238E27FC236}">
-                <a16:creationId xmlns:a16="http://schemas.microsoft.com/office/drawing/2014/main" id="{37F02A10-1E26-7495-2A98-5A25F6E0C729}"/>
-              </a:ext>
-            </a:extLst>
-          </p:cNvPr>
-          <p:cNvPicPr>
-            <a:picLocks noChangeAspect="1"/>
-          </p:cNvPicPr>
-          <p:nvPr/>
-        </p:nvPicPr>
-        <p:blipFill>
-          <a:blip r:embed="rId2"/>
-          <a:stretch>
-            <a:fillRect/>
-          </a:stretch>
-        </p:blipFill>
-        <p:spPr>
-          <a:xfrm>
-            <a:off x="489329" y="856652"/>
-            <a:ext cx="17309341" cy="8573696"/>
-          </a:xfrm>
-          <a:prstGeom prst="rect">
-            <a:avLst/>
-          </a:prstGeom>
-        </p:spPr>
-      </p:pic>
-    </p:spTree>
-    <p:extLst>
-      <p:ext uri="{BB962C8B-B14F-4D97-AF65-F5344CB8AC3E}">
-        <p14:creationId xmlns:p14="http://schemas.microsoft.com/office/powerpoint/2010/main" val="4240209573"/>
-      </p:ext>
-    </p:extLst>
-  </p:cSld>
-  <p:clrMapOvr>
-    <a:masterClrMapping/>
-  </p:clrMapOvr>
-</p:sld>
-</file>
-
-<file path=ppt/slides/slide8.xml><?xml version="1.0" encoding="utf-8"?>
-<p:sld xmlns:a="http://schemas.openxmlformats.org/drawingml/2006/main" xmlns:r="http://schemas.openxmlformats.org/officeDocument/2006/relationships" xmlns:p="http://schemas.openxmlformats.org/presentationml/2006/main">
-  <p:cSld>
-    <p:spTree>
-      <p:nvGrpSpPr>
-        <p:cNvPr id="1" name=""/>
-        <p:cNvGrpSpPr/>
-        <p:nvPr/>
-      </p:nvGrpSpPr>
-      <p:grpSpPr>
-        <a:xfrm>
-          <a:off x="0" y="0"/>
-          <a:ext cx="0" cy="0"/>
-          <a:chOff x="0" y="0"/>
-          <a:chExt cx="0" cy="0"/>
-        </a:xfrm>
-      </p:grpSpPr>
-      <p:pic>
-        <p:nvPicPr>
-          <p:cNvPr id="3" name="Imagen 2">
-            <a:extLst>
-              <a:ext uri="{FF2B5EF4-FFF2-40B4-BE49-F238E27FC236}">
-                <a16:creationId xmlns:a16="http://schemas.microsoft.com/office/drawing/2014/main" id="{F7B6586D-1779-7C85-2D65-0F9826E6ABA4}"/>
-              </a:ext>
-            </a:extLst>
-          </p:cNvPr>
-          <p:cNvPicPr>
-            <a:picLocks noChangeAspect="1"/>
-          </p:cNvPicPr>
-          <p:nvPr/>
-        </p:nvPicPr>
-        <p:blipFill>
-          <a:blip r:embed="rId2"/>
-          <a:stretch>
-            <a:fillRect/>
-          </a:stretch>
-        </p:blipFill>
-        <p:spPr>
-          <a:xfrm>
-            <a:off x="1613436" y="1394889"/>
-            <a:ext cx="15061127" cy="7497221"/>
-          </a:xfrm>
-          <a:prstGeom prst="rect">
-            <a:avLst/>
-          </a:prstGeom>
-        </p:spPr>
-      </p:pic>
-    </p:spTree>
-    <p:extLst>
-      <p:ext uri="{BB962C8B-B14F-4D97-AF65-F5344CB8AC3E}">
-        <p14:creationId xmlns:p14="http://schemas.microsoft.com/office/powerpoint/2010/main" val="3507744762"/>
-      </p:ext>
-    </p:extLst>
-  </p:cSld>
-  <p:clrMapOvr>
-    <a:masterClrMapping/>
-  </p:clrMapOvr>
-</p:sld>
-</file>
-
-<file path=ppt/slides/slide9.xml><?xml version="1.0" encoding="utf-8"?>
-<p:sld xmlns:a="http://schemas.openxmlformats.org/drawingml/2006/main" xmlns:r="http://schemas.openxmlformats.org/officeDocument/2006/relationships" xmlns:p="http://schemas.openxmlformats.org/presentationml/2006/main">
-  <p:cSld>
-    <p:bg>
-      <p:bgPr>
-        <a:solidFill>
-          <a:srgbClr val="F6F4EF"/>
-        </a:solidFill>
-        <a:effectLst/>
-      </p:bgPr>
-    </p:bg>
-    <p:spTree>
-      <p:nvGrpSpPr>
-        <p:cNvPr id="1" name=""/>
-        <p:cNvGrpSpPr/>
-        <p:nvPr/>
-      </p:nvGrpSpPr>
-      <p:grpSpPr>
-        <a:xfrm>
-          <a:off x="0" y="0"/>
-          <a:ext cx="0" cy="0"/>
-          <a:chOff x="0" y="0"/>
-          <a:chExt cx="0" cy="0"/>
-        </a:xfrm>
-      </p:grpSpPr>
-      <p:pic>
-        <p:nvPicPr>
-          <p:cNvPr id="3" name="Imagen 2">
-            <a:extLst>
-              <a:ext uri="{FF2B5EF4-FFF2-40B4-BE49-F238E27FC236}">
-                <a16:creationId xmlns:a16="http://schemas.microsoft.com/office/drawing/2014/main" id="{13345AFF-4ACE-0080-62B9-684542560038}"/>
-              </a:ext>
-            </a:extLst>
-          </p:cNvPr>
-          <p:cNvPicPr>
-            <a:picLocks noChangeAspect="1"/>
-          </p:cNvPicPr>
-          <p:nvPr/>
-        </p:nvPicPr>
-        <p:blipFill>
-          <a:blip r:embed="rId2"/>
-          <a:stretch>
-            <a:fillRect/>
-          </a:stretch>
-        </p:blipFill>
-        <p:spPr>
-          <a:xfrm>
-            <a:off x="427408" y="2309417"/>
-            <a:ext cx="17433183" cy="5668166"/>
-          </a:xfrm>
-          <a:prstGeom prst="rect">
-            <a:avLst/>
-          </a:prstGeom>
-        </p:spPr>
-      </p:pic>
-    </p:spTree>
-    <p:extLst>
-      <p:ext uri="{BB962C8B-B14F-4D97-AF65-F5344CB8AC3E}">
-        <p14:creationId xmlns:p14="http://schemas.microsoft.com/office/powerpoint/2010/main" val="1501440138"/>
-      </p:ext>
-    </p:extLst>
   </p:cSld>
   <p:clrMapOvr>
     <a:masterClrMapping/>
